--- a/заняття_3/Python - ООП, класи, об'єкти та предметна область.pptx
+++ b/заняття_3/Python - ООП, класи, об'єкти та предметна область.pptx
@@ -18924,10 +18924,10 @@
           <p:nvPr/>
         </p:nvPicPr>
         <p:blipFill>
-          <a:blip>
+          <a:blip r:embed="rId3">
             <a:extLst>
               <a:ext uri="{96DAC541-7B7A-43D3-8B79-37D633B846F1}">
-                <asvg:svgBlip xmlns:asvg="http://schemas.microsoft.com/office/drawing/2016/SVG/main" r:embed="rId3"/>
+                <asvg:svgBlip xmlns:asvg="http://schemas.microsoft.com/office/drawing/2016/SVG/main" r:embed="rId4"/>
               </a:ext>
             </a:extLst>
           </a:blip>
@@ -19922,10 +19922,10 @@
           <p:nvPr/>
         </p:nvPicPr>
         <p:blipFill>
-          <a:blip>
+          <a:blip r:embed="rId3">
             <a:extLst>
               <a:ext uri="{96DAC541-7B7A-43D3-8B79-37D633B846F1}">
-                <asvg:svgBlip xmlns:asvg="http://schemas.microsoft.com/office/drawing/2016/SVG/main" r:embed="rId3"/>
+                <asvg:svgBlip xmlns:asvg="http://schemas.microsoft.com/office/drawing/2016/SVG/main" r:embed="rId4"/>
               </a:ext>
             </a:extLst>
           </a:blip>
@@ -20644,10 +20644,10 @@
           <p:nvPr/>
         </p:nvPicPr>
         <p:blipFill>
-          <a:blip>
+          <a:blip r:embed="rId3">
             <a:extLst>
               <a:ext uri="{96DAC541-7B7A-43D3-8B79-37D633B846F1}">
-                <asvg:svgBlip xmlns:asvg="http://schemas.microsoft.com/office/drawing/2016/SVG/main" r:embed="rId3"/>
+                <asvg:svgBlip xmlns:asvg="http://schemas.microsoft.com/office/drawing/2016/SVG/main" r:embed="rId4"/>
               </a:ext>
             </a:extLst>
           </a:blip>
@@ -21711,7 +21711,7 @@
               </a:defRPr>
             </a:pPr>
             <a:r>
-              <a:rPr lang="uk-UA" sz="1800" b="0" dirty="0" err="1">
+              <a:rPr lang="uk-UA" dirty="0">
                 <a:solidFill>
                   <a:srgbClr val="1B6C57"/>
                 </a:solidFill>
@@ -21719,10 +21719,10 @@
                 <a:ea typeface="Onest"/>
                 <a:cs typeface="Onest"/>
               </a:rPr>
-              <a:t>Д</a:t>
-            </a:r>
-            <a:r>
-              <a:rPr sz="1800" b="0" dirty="0" err="1">
+              <a:t>Два</a:t>
+            </a:r>
+            <a:r>
+              <a:rPr sz="1800" b="0" dirty="0">
                 <a:solidFill>
                   <a:srgbClr val="1B6C57"/>
                 </a:solidFill>
@@ -21730,7 +21730,18 @@
                 <a:ea typeface="Onest"/>
                 <a:cs typeface="Onest"/>
               </a:rPr>
-              <a:t>ва</a:t>
+              <a:t> </a:t>
+            </a:r>
+            <a:r>
+              <a:rPr lang="uk-UA" sz="1800" b="0" dirty="0">
+                <a:solidFill>
+                  <a:srgbClr val="1B6C57"/>
+                </a:solidFill>
+                <a:latin typeface="Onest"/>
+                <a:ea typeface="Onest"/>
+                <a:cs typeface="Onest"/>
+              </a:rPr>
+              <a:t>різні профілі без змін класу </a:t>
             </a:r>
             <a:r>
               <a:rPr sz="1800" b="0" dirty="0">
@@ -21741,95 +21752,7 @@
                 <a:ea typeface="Onest"/>
                 <a:cs typeface="Onest"/>
               </a:rPr>
-              <a:t> </a:t>
-            </a:r>
-            <a:r>
-              <a:rPr sz="1800" b="0" dirty="0" err="1">
-                <a:solidFill>
-                  <a:srgbClr val="1B6C57"/>
-                </a:solidFill>
-                <a:latin typeface="Onest"/>
-                <a:ea typeface="Onest"/>
-                <a:cs typeface="Onest"/>
-              </a:rPr>
-              <a:t>різні</a:t>
-            </a:r>
-            <a:r>
-              <a:rPr sz="1800" b="0" dirty="0">
-                <a:solidFill>
-                  <a:srgbClr val="1B6C57"/>
-                </a:solidFill>
-                <a:latin typeface="Onest"/>
-                <a:ea typeface="Onest"/>
-                <a:cs typeface="Onest"/>
-              </a:rPr>
-              <a:t> </a:t>
-            </a:r>
-            <a:r>
-              <a:rPr sz="1800" b="0" dirty="0" err="1">
-                <a:solidFill>
-                  <a:srgbClr val="1B6C57"/>
-                </a:solidFill>
-                <a:latin typeface="Onest"/>
-                <a:ea typeface="Onest"/>
-                <a:cs typeface="Onest"/>
-              </a:rPr>
-              <a:t>профілі</a:t>
-            </a:r>
-            <a:r>
-              <a:rPr sz="1800" b="0" dirty="0">
-                <a:solidFill>
-                  <a:srgbClr val="1B6C57"/>
-                </a:solidFill>
-                <a:latin typeface="Onest"/>
-                <a:ea typeface="Onest"/>
-                <a:cs typeface="Onest"/>
-              </a:rPr>
-              <a:t> без </a:t>
-            </a:r>
-            <a:r>
-              <a:rPr sz="1800" b="0" dirty="0" err="1">
-                <a:solidFill>
-                  <a:srgbClr val="1B6C57"/>
-                </a:solidFill>
-                <a:latin typeface="Onest"/>
-                <a:ea typeface="Onest"/>
-                <a:cs typeface="Onest"/>
-              </a:rPr>
-              <a:t>змін</a:t>
-            </a:r>
-            <a:r>
-              <a:rPr sz="1800" b="0" dirty="0">
-                <a:solidFill>
-                  <a:srgbClr val="1B6C57"/>
-                </a:solidFill>
-                <a:latin typeface="Onest"/>
-                <a:ea typeface="Onest"/>
-                <a:cs typeface="Onest"/>
-              </a:rPr>
-              <a:t> </a:t>
-            </a:r>
-            <a:r>
-              <a:rPr sz="1800" b="0" dirty="0" err="1">
-                <a:solidFill>
-                  <a:srgbClr val="1B6C57"/>
-                </a:solidFill>
-                <a:latin typeface="Onest"/>
-                <a:ea typeface="Onest"/>
-                <a:cs typeface="Onest"/>
-              </a:rPr>
-              <a:t>класу</a:t>
-            </a:r>
-            <a:r>
-              <a:rPr sz="1800" b="0" dirty="0">
-                <a:solidFill>
-                  <a:srgbClr val="1B6C57"/>
-                </a:solidFill>
-                <a:latin typeface="Onest"/>
-                <a:ea typeface="Onest"/>
-                <a:cs typeface="Onest"/>
-              </a:rPr>
-              <a:t> Course.</a:t>
+              <a:t>Course.</a:t>
             </a:r>
           </a:p>
         </p:txBody>
@@ -21887,10 +21810,10 @@
           <p:nvPr/>
         </p:nvPicPr>
         <p:blipFill>
-          <a:blip>
+          <a:blip r:embed="rId3">
             <a:extLst>
               <a:ext uri="{96DAC541-7B7A-43D3-8B79-37D633B846F1}">
-                <asvg:svgBlip xmlns:asvg="http://schemas.microsoft.com/office/drawing/2016/SVG/main" r:embed="rId3"/>
+                <asvg:svgBlip xmlns:asvg="http://schemas.microsoft.com/office/drawing/2016/SVG/main" r:embed="rId4"/>
               </a:ext>
             </a:extLst>
           </a:blip>
@@ -23006,10 +22929,10 @@
           <p:nvPr/>
         </p:nvPicPr>
         <p:blipFill>
-          <a:blip>
+          <a:blip r:embed="rId3">
             <a:extLst>
               <a:ext uri="{96DAC541-7B7A-43D3-8B79-37D633B846F1}">
-                <asvg:svgBlip xmlns:asvg="http://schemas.microsoft.com/office/drawing/2016/SVG/main" r:embed="rId3"/>
+                <asvg:svgBlip xmlns:asvg="http://schemas.microsoft.com/office/drawing/2016/SVG/main" r:embed="rId4"/>
               </a:ext>
             </a:extLst>
           </a:blip>
@@ -23690,10 +23613,10 @@
           <p:nvPr/>
         </p:nvPicPr>
         <p:blipFill>
-          <a:blip>
+          <a:blip r:embed="rId3">
             <a:extLst>
               <a:ext uri="{96DAC541-7B7A-43D3-8B79-37D633B846F1}">
-                <asvg:svgBlip xmlns:asvg="http://schemas.microsoft.com/office/drawing/2016/SVG/main" r:embed="rId3"/>
+                <asvg:svgBlip xmlns:asvg="http://schemas.microsoft.com/office/drawing/2016/SVG/main" r:embed="rId4"/>
               </a:ext>
             </a:extLst>
           </a:blip>
@@ -24488,10 +24411,10 @@
           <p:nvPr/>
         </p:nvPicPr>
         <p:blipFill>
-          <a:blip>
+          <a:blip r:embed="rId3">
             <a:extLst>
               <a:ext uri="{96DAC541-7B7A-43D3-8B79-37D633B846F1}">
-                <asvg:svgBlip xmlns:asvg="http://schemas.microsoft.com/office/drawing/2016/SVG/main" r:embed="rId3"/>
+                <asvg:svgBlip xmlns:asvg="http://schemas.microsoft.com/office/drawing/2016/SVG/main" r:embed="rId4"/>
               </a:ext>
             </a:extLst>
           </a:blip>
@@ -25765,10 +25688,10 @@
           <p:nvPr/>
         </p:nvPicPr>
         <p:blipFill>
-          <a:blip>
+          <a:blip r:embed="rId3">
             <a:extLst>
               <a:ext uri="{96DAC541-7B7A-43D3-8B79-37D633B846F1}">
-                <asvg:svgBlip xmlns:asvg="http://schemas.microsoft.com/office/drawing/2016/SVG/main" r:embed="rId3"/>
+                <asvg:svgBlip xmlns:asvg="http://schemas.microsoft.com/office/drawing/2016/SVG/main" r:embed="rId4"/>
               </a:ext>
             </a:extLst>
           </a:blip>
@@ -26914,10 +26837,10 @@
           <p:nvPr/>
         </p:nvPicPr>
         <p:blipFill>
-          <a:blip>
+          <a:blip r:embed="rId3">
             <a:extLst>
               <a:ext uri="{96DAC541-7B7A-43D3-8B79-37D633B846F1}">
-                <asvg:svgBlip xmlns:asvg="http://schemas.microsoft.com/office/drawing/2016/SVG/main" r:embed="rId3"/>
+                <asvg:svgBlip xmlns:asvg="http://schemas.microsoft.com/office/drawing/2016/SVG/main" r:embed="rId4"/>
               </a:ext>
             </a:extLst>
           </a:blip>
@@ -27633,10 +27556,10 @@
           <p:nvPr/>
         </p:nvPicPr>
         <p:blipFill>
-          <a:blip>
+          <a:blip r:embed="rId3">
             <a:extLst>
               <a:ext uri="{96DAC541-7B7A-43D3-8B79-37D633B846F1}">
-                <asvg:svgBlip xmlns:asvg="http://schemas.microsoft.com/office/drawing/2016/SVG/main" r:embed="rId3"/>
+                <asvg:svgBlip xmlns:asvg="http://schemas.microsoft.com/office/drawing/2016/SVG/main" r:embed="rId4"/>
               </a:ext>
             </a:extLst>
           </a:blip>
@@ -29384,10 +29307,10 @@
           <p:nvPr/>
         </p:nvPicPr>
         <p:blipFill>
-          <a:blip>
+          <a:blip r:embed="rId3">
             <a:extLst>
               <a:ext uri="{96DAC541-7B7A-43D3-8B79-37D633B846F1}">
-                <asvg:svgBlip xmlns:asvg="http://schemas.microsoft.com/office/drawing/2016/SVG/main" r:embed="rId3"/>
+                <asvg:svgBlip xmlns:asvg="http://schemas.microsoft.com/office/drawing/2016/SVG/main" r:embed="rId4"/>
               </a:ext>
             </a:extLst>
           </a:blip>
@@ -30561,10 +30484,10 @@
           <p:nvPr/>
         </p:nvPicPr>
         <p:blipFill>
-          <a:blip>
+          <a:blip r:embed="rId3">
             <a:extLst>
               <a:ext uri="{96DAC541-7B7A-43D3-8B79-37D633B846F1}">
-                <asvg:svgBlip xmlns:asvg="http://schemas.microsoft.com/office/drawing/2016/SVG/main" r:embed="rId3"/>
+                <asvg:svgBlip xmlns:asvg="http://schemas.microsoft.com/office/drawing/2016/SVG/main" r:embed="rId4"/>
               </a:ext>
             </a:extLst>
           </a:blip>
@@ -31692,10 +31615,10 @@
           <p:nvPr/>
         </p:nvPicPr>
         <p:blipFill>
-          <a:blip>
+          <a:blip r:embed="rId3">
             <a:extLst>
               <a:ext uri="{96DAC541-7B7A-43D3-8B79-37D633B846F1}">
-                <asvg:svgBlip xmlns:asvg="http://schemas.microsoft.com/office/drawing/2016/SVG/main" r:embed="rId3"/>
+                <asvg:svgBlip xmlns:asvg="http://schemas.microsoft.com/office/drawing/2016/SVG/main" r:embed="rId4"/>
               </a:ext>
             </a:extLst>
           </a:blip>
@@ -32468,10 +32391,10 @@
           <p:nvPr/>
         </p:nvPicPr>
         <p:blipFill>
-          <a:blip>
+          <a:blip r:embed="rId3">
             <a:extLst>
               <a:ext uri="{96DAC541-7B7A-43D3-8B79-37D633B846F1}">
-                <asvg:svgBlip xmlns:asvg="http://schemas.microsoft.com/office/drawing/2016/SVG/main" r:embed="rId3"/>
+                <asvg:svgBlip xmlns:asvg="http://schemas.microsoft.com/office/drawing/2016/SVG/main" r:embed="rId4"/>
               </a:ext>
             </a:extLst>
           </a:blip>
@@ -33896,10 +33819,10 @@
           <p:nvPr/>
         </p:nvPicPr>
         <p:blipFill>
-          <a:blip>
+          <a:blip r:embed="rId3">
             <a:extLst>
               <a:ext uri="{96DAC541-7B7A-43D3-8B79-37D633B846F1}">
-                <asvg:svgBlip xmlns:asvg="http://schemas.microsoft.com/office/drawing/2016/SVG/main" r:embed="rId3"/>
+                <asvg:svgBlip xmlns:asvg="http://schemas.microsoft.com/office/drawing/2016/SVG/main" r:embed="rId4"/>
               </a:ext>
             </a:extLst>
           </a:blip>
@@ -35068,10 +34991,10 @@
           <p:nvPr/>
         </p:nvPicPr>
         <p:blipFill>
-          <a:blip>
+          <a:blip r:embed="rId3">
             <a:extLst>
               <a:ext uri="{96DAC541-7B7A-43D3-8B79-37D633B846F1}">
-                <asvg:svgBlip xmlns:asvg="http://schemas.microsoft.com/office/drawing/2016/SVG/main" r:embed="rId3"/>
+                <asvg:svgBlip xmlns:asvg="http://schemas.microsoft.com/office/drawing/2016/SVG/main" r:embed="rId4"/>
               </a:ext>
             </a:extLst>
           </a:blip>
@@ -36236,10 +36159,10 @@
           <p:nvPr/>
         </p:nvPicPr>
         <p:blipFill>
-          <a:blip>
+          <a:blip r:embed="rId3">
             <a:extLst>
               <a:ext uri="{96DAC541-7B7A-43D3-8B79-37D633B846F1}">
-                <asvg:svgBlip xmlns:asvg="http://schemas.microsoft.com/office/drawing/2016/SVG/main" r:embed="rId3"/>
+                <asvg:svgBlip xmlns:asvg="http://schemas.microsoft.com/office/drawing/2016/SVG/main" r:embed="rId4"/>
               </a:ext>
             </a:extLst>
           </a:blip>
@@ -37657,10 +37580,10 @@
           <p:nvPr/>
         </p:nvPicPr>
         <p:blipFill>
-          <a:blip>
+          <a:blip r:embed="rId3">
             <a:extLst>
               <a:ext uri="{96DAC541-7B7A-43D3-8B79-37D633B846F1}">
-                <asvg:svgBlip xmlns:asvg="http://schemas.microsoft.com/office/drawing/2016/SVG/main" r:embed="rId3"/>
+                <asvg:svgBlip xmlns:asvg="http://schemas.microsoft.com/office/drawing/2016/SVG/main" r:embed="rId4"/>
               </a:ext>
             </a:extLst>
           </a:blip>
@@ -39201,10 +39124,10 @@
           <p:nvPr/>
         </p:nvPicPr>
         <p:blipFill>
-          <a:blip>
+          <a:blip r:embed="rId3">
             <a:extLst>
               <a:ext uri="{96DAC541-7B7A-43D3-8B79-37D633B846F1}">
-                <asvg:svgBlip xmlns:asvg="http://schemas.microsoft.com/office/drawing/2016/SVG/main" r:embed="rId3"/>
+                <asvg:svgBlip xmlns:asvg="http://schemas.microsoft.com/office/drawing/2016/SVG/main" r:embed="rId4"/>
               </a:ext>
             </a:extLst>
           </a:blip>
@@ -40162,10 +40085,10 @@
           <p:nvPr/>
         </p:nvPicPr>
         <p:blipFill>
-          <a:blip>
+          <a:blip r:embed="rId3">
             <a:extLst>
               <a:ext uri="{96DAC541-7B7A-43D3-8B79-37D633B846F1}">
-                <asvg:svgBlip xmlns:asvg="http://schemas.microsoft.com/office/drawing/2016/SVG/main" r:embed="rId3"/>
+                <asvg:svgBlip xmlns:asvg="http://schemas.microsoft.com/office/drawing/2016/SVG/main" r:embed="rId4"/>
               </a:ext>
             </a:extLst>
           </a:blip>
@@ -41087,10 +41010,10 @@
           <p:nvPr/>
         </p:nvPicPr>
         <p:blipFill>
-          <a:blip>
+          <a:blip r:embed="rId3">
             <a:extLst>
               <a:ext uri="{96DAC541-7B7A-43D3-8B79-37D633B846F1}">
-                <asvg:svgBlip xmlns:asvg="http://schemas.microsoft.com/office/drawing/2016/SVG/main" r:embed="rId3"/>
+                <asvg:svgBlip xmlns:asvg="http://schemas.microsoft.com/office/drawing/2016/SVG/main" r:embed="rId4"/>
               </a:ext>
             </a:extLst>
           </a:blip>
@@ -41819,10 +41742,10 @@
           <p:nvPr/>
         </p:nvPicPr>
         <p:blipFill>
-          <a:blip>
+          <a:blip r:embed="rId3">
             <a:extLst>
               <a:ext uri="{96DAC541-7B7A-43D3-8B79-37D633B846F1}">
-                <asvg:svgBlip xmlns:asvg="http://schemas.microsoft.com/office/drawing/2016/SVG/main" r:embed="rId3"/>
+                <asvg:svgBlip xmlns:asvg="http://schemas.microsoft.com/office/drawing/2016/SVG/main" r:embed="rId4"/>
               </a:ext>
             </a:extLst>
           </a:blip>
@@ -42923,10 +42846,10 @@
           <p:nvPr/>
         </p:nvPicPr>
         <p:blipFill>
-          <a:blip>
+          <a:blip r:embed="rId3">
             <a:extLst>
               <a:ext uri="{96DAC541-7B7A-43D3-8B79-37D633B846F1}">
-                <asvg:svgBlip xmlns:asvg="http://schemas.microsoft.com/office/drawing/2016/SVG/main" r:embed="rId3"/>
+                <asvg:svgBlip xmlns:asvg="http://schemas.microsoft.com/office/drawing/2016/SVG/main" r:embed="rId4"/>
               </a:ext>
             </a:extLst>
           </a:blip>
@@ -43655,10 +43578,10 @@
           <p:nvPr/>
         </p:nvPicPr>
         <p:blipFill>
-          <a:blip>
+          <a:blip r:embed="rId3">
             <a:extLst>
               <a:ext uri="{96DAC541-7B7A-43D3-8B79-37D633B846F1}">
-                <asvg:svgBlip xmlns:asvg="http://schemas.microsoft.com/office/drawing/2016/SVG/main" r:embed="rId3"/>
+                <asvg:svgBlip xmlns:asvg="http://schemas.microsoft.com/office/drawing/2016/SVG/main" r:embed="rId4"/>
               </a:ext>
             </a:extLst>
           </a:blip>
@@ -44387,10 +44310,10 @@
           <p:nvPr/>
         </p:nvPicPr>
         <p:blipFill>
-          <a:blip>
+          <a:blip r:embed="rId3">
             <a:extLst>
               <a:ext uri="{96DAC541-7B7A-43D3-8B79-37D633B846F1}">
-                <asvg:svgBlip xmlns:asvg="http://schemas.microsoft.com/office/drawing/2016/SVG/main" r:embed="rId3"/>
+                <asvg:svgBlip xmlns:asvg="http://schemas.microsoft.com/office/drawing/2016/SVG/main" r:embed="rId4"/>
               </a:ext>
             </a:extLst>
           </a:blip>
@@ -45119,10 +45042,10 @@
           <p:nvPr/>
         </p:nvPicPr>
         <p:blipFill>
-          <a:blip>
+          <a:blip r:embed="rId3">
             <a:extLst>
               <a:ext uri="{96DAC541-7B7A-43D3-8B79-37D633B846F1}">
-                <asvg:svgBlip xmlns:asvg="http://schemas.microsoft.com/office/drawing/2016/SVG/main" r:embed="rId3"/>
+                <asvg:svgBlip xmlns:asvg="http://schemas.microsoft.com/office/drawing/2016/SVG/main" r:embed="rId4"/>
               </a:ext>
             </a:extLst>
           </a:blip>
@@ -46153,10 +46076,10 @@
           <p:nvPr/>
         </p:nvPicPr>
         <p:blipFill>
-          <a:blip>
+          <a:blip r:embed="rId3">
             <a:extLst>
               <a:ext uri="{96DAC541-7B7A-43D3-8B79-37D633B846F1}">
-                <asvg:svgBlip xmlns:asvg="http://schemas.microsoft.com/office/drawing/2016/SVG/main" r:embed="rId3"/>
+                <asvg:svgBlip xmlns:asvg="http://schemas.microsoft.com/office/drawing/2016/SVG/main" r:embed="rId4"/>
               </a:ext>
             </a:extLst>
           </a:blip>
@@ -47421,10 +47344,10 @@
           <p:nvPr/>
         </p:nvPicPr>
         <p:blipFill>
-          <a:blip>
+          <a:blip r:embed="rId3">
             <a:extLst>
               <a:ext uri="{96DAC541-7B7A-43D3-8B79-37D633B846F1}">
-                <asvg:svgBlip xmlns:asvg="http://schemas.microsoft.com/office/drawing/2016/SVG/main" r:embed="rId3"/>
+                <asvg:svgBlip xmlns:asvg="http://schemas.microsoft.com/office/drawing/2016/SVG/main" r:embed="rId4"/>
               </a:ext>
             </a:extLst>
           </a:blip>
@@ -48774,10 +48697,10 @@
           <p:nvPr/>
         </p:nvPicPr>
         <p:blipFill>
-          <a:blip>
+          <a:blip r:embed="rId3">
             <a:extLst>
               <a:ext uri="{96DAC541-7B7A-43D3-8B79-37D633B846F1}">
-                <asvg:svgBlip xmlns:asvg="http://schemas.microsoft.com/office/drawing/2016/SVG/main" r:embed="rId3"/>
+                <asvg:svgBlip xmlns:asvg="http://schemas.microsoft.com/office/drawing/2016/SVG/main" r:embed="rId4"/>
               </a:ext>
             </a:extLst>
           </a:blip>
@@ -49817,10 +49740,10 @@
           <p:nvPr/>
         </p:nvPicPr>
         <p:blipFill>
-          <a:blip>
+          <a:blip r:embed="rId3">
             <a:extLst>
               <a:ext uri="{96DAC541-7B7A-43D3-8B79-37D633B846F1}">
-                <asvg:svgBlip xmlns:asvg="http://schemas.microsoft.com/office/drawing/2016/SVG/main" r:embed="rId3"/>
+                <asvg:svgBlip xmlns:asvg="http://schemas.microsoft.com/office/drawing/2016/SVG/main" r:embed="rId4"/>
               </a:ext>
             </a:extLst>
           </a:blip>
@@ -50556,10 +50479,10 @@
           <p:nvPr/>
         </p:nvPicPr>
         <p:blipFill>
-          <a:blip>
+          <a:blip r:embed="rId3">
             <a:extLst>
               <a:ext uri="{96DAC541-7B7A-43D3-8B79-37D633B846F1}">
-                <asvg:svgBlip xmlns:asvg="http://schemas.microsoft.com/office/drawing/2016/SVG/main" r:embed="rId3"/>
+                <asvg:svgBlip xmlns:asvg="http://schemas.microsoft.com/office/drawing/2016/SVG/main" r:embed="rId4"/>
               </a:ext>
             </a:extLst>
           </a:blip>
